--- a/submission/SIH2026_SIH26145_EKAGRA_idea.pptx
+++ b/submission/SIH2026_SIH26145_EKAGRA_idea.pptx
@@ -7992,7 +7992,7 @@
                 </a:solidFill>
                 <a:latin typeface="Calibri"/>
               </a:rPr>
-              <a:t>Stack  -  Python 3.12, XGBoost, NumPy/Pandas, PyTorch, pytest. No external service in the detection path, by design.</a:t>
+              <a:t>Stack  -  Python 3.12, XGBoost, scikit-learn, NumPy/Pandas, SciPy, cryptography, pytest. No neural network and no external service in the detection path, by design.</a:t>
             </a:r>
           </a:p>
         </p:txBody>
@@ -11348,7 +11348,7 @@
         <p:spPr bwMode="auto">
           <a:xfrm>
             <a:off x="612648" y="1188720"/>
-            <a:ext cx="10972800" cy="4937760"/>
+            <a:ext cx="10972800" cy="4069080"/>
           </a:xfrm>
           <a:prstGeom prst="rect">
             <a:avLst/>
@@ -11375,7 +11375,7 @@
                 <a:spcPts val="0"/>
               </a:spcBef>
               <a:spcAft>
-                <a:spcPts val="600"/>
+                <a:spcPts val="450"/>
               </a:spcAft>
               <a:buClrTx/>
               <a:buSzTx/>
@@ -11391,7 +11391,7 @@
                 </a:solidFill>
                 <a:latin typeface="Calibri"/>
               </a:rPr>
-              <a:t>Datasets</a:t>
+              <a:t>Datasets  -  addresses printed below, and scannable at the foot of this slide</a:t>
             </a:r>
             <a:endParaRPr kumimoji="0" lang="en-US" sz="2800" b="0" i="0" u="none" strike="noStrike" kern="1200" cap="none" spc="0" normalizeH="0" baseline="0" noProof="0" dirty="0">
               <a:ln>
@@ -11414,7 +11414,7 @@
                 <a:spcPts val="0"/>
               </a:spcBef>
               <a:spcAft>
-                <a:spcPts val="400"/>
+                <a:spcPts val="250"/>
               </a:spcAft>
             </a:pPr>
             <a:r>
@@ -11424,7 +11424,17 @@
                 </a:solidFill>
                 <a:latin typeface="Calibri"/>
               </a:rPr>
-              <a:t>Huang, Bois &amp; Marchioro - Corrected CICFlowMeter Datasets: CIC-IDS 2017. Zenodo 22016274 (CC-BY-4.0). Chosen over the original CSVs, which have documented label and feature-extractor defects.</a:t>
+              <a:t>Huang, Bois &amp; Marchioro - Corrected CICFlowMeter Datasets: CIC-IDS 2017. Zenodo 22016274 (CC-BY-4.0). 877,801 flows, the corpus every measured number on these slides comes from. Chosen over the original CSVs, which have documented label and feature-extractor defects.</a:t>
+            </a:r>
+            <a:r>
+              <a:rPr sz="1050" b="0" u="sng">
+                <a:solidFill>
+                  <a:srgbClr val="0B6B63"/>
+                </a:solidFill>
+                <a:latin typeface="Calibri"/>
+                <a:hlinkClick r:id="rId4"/>
+              </a:rPr>
+              <a:t>  zenodo.org/records/22016274</a:t>
             </a:r>
           </a:p>
           <a:p>
@@ -11433,7 +11443,7 @@
                 <a:spcPts val="0"/>
               </a:spcBef>
               <a:spcAft>
-                <a:spcPts val="400"/>
+                <a:spcPts val="250"/>
               </a:spcAft>
             </a:pPr>
             <a:r>
@@ -11443,7 +11453,65 @@
                 </a:solidFill>
                 <a:latin typeface="Calibri"/>
               </a:rPr>
-              <a:t>Engelen, Rimmer &amp; Joosen - Troubleshooting an Intrusion Detection Dataset: the CICIDS2017 case study. IEEE S&amp;P Workshops, 2021.</a:t>
+              <a:t>Source corpus it re-extracts - CIC-IDS2017, Canadian Institute for Cybersecurity, University of New Brunswick.</a:t>
+            </a:r>
+            <a:r>
+              <a:rPr sz="1050" b="0" u="sng">
+                <a:solidFill>
+                  <a:srgbClr val="0B6B63"/>
+                </a:solidFill>
+                <a:latin typeface="Calibri"/>
+                <a:hlinkClick r:id="rId5"/>
+              </a:rPr>
+              <a:t>  unb.ca/cic/datasets/ids-2017.html</a:t>
+            </a:r>
+          </a:p>
+          <a:p>
+            <a:pPr algn="l">
+              <a:spcBef>
+                <a:spcPts val="0"/>
+              </a:spcBef>
+              <a:spcAft>
+                <a:spcPts val="250"/>
+              </a:spcAft>
+            </a:pPr>
+            <a:r>
+              <a:rPr sz="1150" b="0">
+                <a:solidFill>
+                  <a:srgbClr val="141918"/>
+                </a:solidFill>
+                <a:latin typeface="Calibri"/>
+              </a:rPr>
+              <a:t>Engelen, Rimmer &amp; Joosen - Troubleshooting an Intrusion Detection Dataset: the CICIDS2017 case study. IEEE S&amp;P Workshops, 2021. Why we use the corrected re-extraction.</a:t>
+            </a:r>
+            <a:r>
+              <a:rPr sz="1050" b="0" u="sng">
+                <a:solidFill>
+                  <a:srgbClr val="0B6B63"/>
+                </a:solidFill>
+                <a:latin typeface="Calibri"/>
+                <a:hlinkClick r:id="rId6"/>
+              </a:rPr>
+              <a:t>  doi.org/10.1109/SPW53761.2021.00009</a:t>
+            </a:r>
+          </a:p>
+          <a:p>
+            <a:pPr algn="l">
+              <a:spcBef>
+                <a:spcPts val="0"/>
+              </a:spcBef>
+              <a:spcAft>
+                <a:spcPts val="250"/>
+              </a:spcAft>
+            </a:pPr>
+            <a:r>
+              <a:rPr sz="1150" b="0">
+                <a:solidFill>
+                  <a:srgbClr val="141918"/>
+                </a:solidFill>
+                <a:latin typeface="Calibri"/>
+              </a:rPr>
+              <a:t>Our own capture - 147 MB, 6 minutes of ordinary browsing, 148,416 packets. Not redistributable (personal traffic); the TLS, JA4 and QUIC findings come from it and reproduce on any capture.</a:t>
             </a:r>
           </a:p>
           <a:p>
@@ -11452,7 +11520,7 @@
                 <a:spcPts val="800"/>
               </a:spcBef>
               <a:spcAft>
-                <a:spcPts val="600"/>
+                <a:spcPts val="450"/>
               </a:spcAft>
             </a:pPr>
             <a:r>
@@ -11471,7 +11539,7 @@
                 <a:spcPts val="0"/>
               </a:spcBef>
               <a:spcAft>
-                <a:spcPts val="400"/>
+                <a:spcPts val="250"/>
               </a:spcAft>
             </a:pPr>
             <a:r>
@@ -11490,7 +11558,7 @@
                 <a:spcPts val="0"/>
               </a:spcBef>
               <a:spcAft>
-                <a:spcPts val="400"/>
+                <a:spcPts val="250"/>
               </a:spcAft>
             </a:pPr>
             <a:r>
@@ -11509,7 +11577,7 @@
                 <a:spcPts val="0"/>
               </a:spcBef>
               <a:spcAft>
-                <a:spcPts val="400"/>
+                <a:spcPts val="250"/>
               </a:spcAft>
             </a:pPr>
             <a:r>
@@ -11528,7 +11596,7 @@
                 <a:spcPts val="800"/>
               </a:spcBef>
               <a:spcAft>
-                <a:spcPts val="600"/>
+                <a:spcPts val="450"/>
               </a:spcAft>
             </a:pPr>
             <a:r>
@@ -11547,7 +11615,7 @@
                 <a:spcPts val="0"/>
               </a:spcBef>
               <a:spcAft>
-                <a:spcPts val="400"/>
+                <a:spcPts val="250"/>
               </a:spcAft>
             </a:pPr>
             <a:r>
@@ -11566,7 +11634,7 @@
                 <a:spcPts val="800"/>
               </a:spcBef>
               <a:spcAft>
-                <a:spcPts val="600"/>
+                <a:spcPts val="450"/>
               </a:spcAft>
             </a:pPr>
             <a:r>
@@ -11585,7 +11653,7 @@
                 <a:spcPts val="0"/>
               </a:spcBef>
               <a:spcAft>
-                <a:spcPts val="400"/>
+                <a:spcPts val="250"/>
               </a:spcAft>
             </a:pPr>
             <a:r>
@@ -11595,7 +11663,17 @@
                 </a:solidFill>
                 <a:latin typeface="Calibri"/>
               </a:rPr>
-              <a:t>Repository with all experiments, pre-registered predictions and verdicts, and one-command reproduction: [REPO URL]</a:t>
+              <a:t>Repository with all experiments, pre-registered predictions and verdicts, and one-command reproduction:</a:t>
+            </a:r>
+            <a:r>
+              <a:rPr sz="1050" b="0" u="sng">
+                <a:solidFill>
+                  <a:srgbClr val="0B6B63"/>
+                </a:solidFill>
+                <a:latin typeface="Calibri"/>
+                <a:hlinkClick r:id="rId7"/>
+              </a:rPr>
+              <a:t>  github.com/AKRai-2005/ekagra</a:t>
             </a:r>
           </a:p>
         </p:txBody>
@@ -11835,6 +11913,376 @@
           </a:prstGeom>
         </p:spPr>
       </p:pic>
+      <p:sp>
+        <p:nvSpPr>
+          <p:cNvPr id="17411" name="Rounded Rectangle 17410"/>
+          <p:cNvSpPr/>
+          <p:nvPr/>
+        </p:nvSpPr>
+        <p:spPr>
+          <a:xfrm>
+            <a:off x="612648" y="5340096"/>
+            <a:ext cx="10972800" cy="960120"/>
+          </a:xfrm>
+          <a:prstGeom prst="roundRect">
+            <a:avLst/>
+          </a:prstGeom>
+          <a:solidFill>
+            <a:srgbClr val="F4F7F6"/>
+          </a:solidFill>
+          <a:ln>
+            <a:noFill/>
+          </a:ln>
+          <a:effectLst/>
+        </p:spPr>
+        <p:style>
+          <a:lnRef idx="1">
+            <a:schemeClr val="accent1"/>
+          </a:lnRef>
+          <a:fillRef idx="3">
+            <a:schemeClr val="accent1"/>
+          </a:fillRef>
+          <a:effectRef idx="2">
+            <a:schemeClr val="accent1"/>
+          </a:effectRef>
+          <a:fontRef idx="minor">
+            <a:schemeClr val="lt1"/>
+          </a:fontRef>
+        </p:style>
+        <p:txBody>
+          <a:bodyPr rtlCol="0" anchor="ctr" wrap="square" lIns="54864" rIns="54864" tIns="27432" bIns="27432"/>
+          <a:lstStyle/>
+          <a:p>
+            <a:pPr algn="l"/>
+            <a:r>
+              <a:rPr sz="1100" b="0">
+                <a:solidFill>
+                  <a:srgbClr val="141918"/>
+                </a:solidFill>
+                <a:latin typeface="Calibri"/>
+              </a:rPr>
+              <a:t/>
+            </a:r>
+          </a:p>
+        </p:txBody>
+      </p:sp>
+      <p:sp>
+        <p:nvSpPr>
+          <p:cNvPr id="17412" name="TextBox 17411"/>
+          <p:cNvSpPr txBox="1"/>
+          <p:nvPr/>
+        </p:nvSpPr>
+        <p:spPr>
+          <a:xfrm>
+            <a:off x="731520" y="5367528"/>
+            <a:ext cx="5486400" cy="182880"/>
+          </a:xfrm>
+          <a:prstGeom prst="rect">
+            <a:avLst/>
+          </a:prstGeom>
+          <a:noFill/>
+        </p:spPr>
+        <p:txBody>
+          <a:bodyPr wrap="square" lIns="0" rIns="0" tIns="0" bIns="0">
+            <a:spAutoFit/>
+          </a:bodyPr>
+          <a:lstStyle/>
+          <a:p>
+            <a:pPr algn="l"/>
+            <a:r>
+              <a:rPr sz="800" b="1">
+                <a:solidFill>
+                  <a:srgbClr val="0B6B63"/>
+                </a:solidFill>
+                <a:latin typeface="Calibri"/>
+              </a:rPr>
+              <a:t>SCAN OR TYPE  -  the datasets, reachable from any device</a:t>
+            </a:r>
+          </a:p>
+        </p:txBody>
+      </p:sp>
+      <p:pic>
+        <p:nvPicPr>
+          <p:cNvPr id="17413" name="Picture 17412" descr="qr_3c73e79a8586.png"/>
+          <p:cNvPicPr>
+            <a:picLocks noChangeAspect="1"/>
+          </p:cNvPicPr>
+          <p:nvPr/>
+        </p:nvPicPr>
+        <p:blipFill>
+          <a:blip r:embed="rId8"/>
+          <a:stretch>
+            <a:fillRect/>
+          </a:stretch>
+        </p:blipFill>
+        <p:spPr>
+          <a:xfrm>
+            <a:off x="731520" y="5541264"/>
+            <a:ext cx="713232" cy="713232"/>
+          </a:xfrm>
+          <a:prstGeom prst="rect">
+            <a:avLst/>
+          </a:prstGeom>
+        </p:spPr>
+      </p:pic>
+      <p:sp>
+        <p:nvSpPr>
+          <p:cNvPr id="17414" name="TextBox 17413"/>
+          <p:cNvSpPr txBox="1"/>
+          <p:nvPr/>
+        </p:nvSpPr>
+        <p:spPr>
+          <a:xfrm>
+            <a:off x="1536192" y="5577840"/>
+            <a:ext cx="2743200" cy="201168"/>
+          </a:xfrm>
+          <a:prstGeom prst="rect">
+            <a:avLst/>
+          </a:prstGeom>
+          <a:noFill/>
+        </p:spPr>
+        <p:txBody>
+          <a:bodyPr wrap="square" lIns="0" rIns="0" tIns="0" bIns="0">
+            <a:spAutoFit/>
+          </a:bodyPr>
+          <a:lstStyle/>
+          <a:p>
+            <a:pPr algn="l"/>
+            <a:r>
+              <a:rPr sz="900" b="1">
+                <a:solidFill>
+                  <a:srgbClr val="141918"/>
+                </a:solidFill>
+                <a:latin typeface="Calibri"/>
+              </a:rPr>
+              <a:t>Corrected CIC-IDS2017 (the one we used)</a:t>
+            </a:r>
+          </a:p>
+        </p:txBody>
+      </p:sp>
+      <p:sp>
+        <p:nvSpPr>
+          <p:cNvPr id="17415" name="TextBox 17414"/>
+          <p:cNvSpPr txBox="1"/>
+          <p:nvPr/>
+        </p:nvSpPr>
+        <p:spPr>
+          <a:xfrm>
+            <a:off x="1536192" y="5797296"/>
+            <a:ext cx="2743200" cy="365760"/>
+          </a:xfrm>
+          <a:prstGeom prst="rect">
+            <a:avLst/>
+          </a:prstGeom>
+          <a:noFill/>
+        </p:spPr>
+        <p:txBody>
+          <a:bodyPr wrap="square" lIns="0" rIns="0" tIns="0" bIns="0">
+            <a:spAutoFit/>
+          </a:bodyPr>
+          <a:lstStyle/>
+          <a:p>
+            <a:pPr algn="l"/>
+            <a:r>
+              <a:rPr sz="800" b="0">
+                <a:solidFill>
+                  <a:srgbClr val="55605D"/>
+                </a:solidFill>
+                <a:latin typeface="Calibri"/>
+              </a:rPr>
+              <a:t>zenodo.org/records/22016274</a:t>
+            </a:r>
+          </a:p>
+        </p:txBody>
+      </p:sp>
+      <p:pic>
+        <p:nvPicPr>
+          <p:cNvPr id="17416" name="Picture 17415" descr="qr_bee78d23fcf0.png"/>
+          <p:cNvPicPr>
+            <a:picLocks noChangeAspect="1"/>
+          </p:cNvPicPr>
+          <p:nvPr/>
+        </p:nvPicPr>
+        <p:blipFill>
+          <a:blip r:embed="rId9"/>
+          <a:stretch>
+            <a:fillRect/>
+          </a:stretch>
+        </p:blipFill>
+        <p:spPr>
+          <a:xfrm>
+            <a:off x="4343400" y="5541264"/>
+            <a:ext cx="713232" cy="713232"/>
+          </a:xfrm>
+          <a:prstGeom prst="rect">
+            <a:avLst/>
+          </a:prstGeom>
+        </p:spPr>
+      </p:pic>
+      <p:sp>
+        <p:nvSpPr>
+          <p:cNvPr id="17417" name="TextBox 17416"/>
+          <p:cNvSpPr txBox="1"/>
+          <p:nvPr/>
+        </p:nvSpPr>
+        <p:spPr>
+          <a:xfrm>
+            <a:off x="5148072" y="5577840"/>
+            <a:ext cx="2743200" cy="201168"/>
+          </a:xfrm>
+          <a:prstGeom prst="rect">
+            <a:avLst/>
+          </a:prstGeom>
+          <a:noFill/>
+        </p:spPr>
+        <p:txBody>
+          <a:bodyPr wrap="square" lIns="0" rIns="0" tIns="0" bIns="0">
+            <a:spAutoFit/>
+          </a:bodyPr>
+          <a:lstStyle/>
+          <a:p>
+            <a:pPr algn="l"/>
+            <a:r>
+              <a:rPr sz="900" b="1">
+                <a:solidFill>
+                  <a:srgbClr val="141918"/>
+                </a:solidFill>
+                <a:latin typeface="Calibri"/>
+              </a:rPr>
+              <a:t>Original CIC-IDS2017 (UNB CIC)</a:t>
+            </a:r>
+          </a:p>
+        </p:txBody>
+      </p:sp>
+      <p:sp>
+        <p:nvSpPr>
+          <p:cNvPr id="17418" name="TextBox 17417"/>
+          <p:cNvSpPr txBox="1"/>
+          <p:nvPr/>
+        </p:nvSpPr>
+        <p:spPr>
+          <a:xfrm>
+            <a:off x="5148072" y="5797296"/>
+            <a:ext cx="2743200" cy="365760"/>
+          </a:xfrm>
+          <a:prstGeom prst="rect">
+            <a:avLst/>
+          </a:prstGeom>
+          <a:noFill/>
+        </p:spPr>
+        <p:txBody>
+          <a:bodyPr wrap="square" lIns="0" rIns="0" tIns="0" bIns="0">
+            <a:spAutoFit/>
+          </a:bodyPr>
+          <a:lstStyle/>
+          <a:p>
+            <a:pPr algn="l"/>
+            <a:r>
+              <a:rPr sz="800" b="0">
+                <a:solidFill>
+                  <a:srgbClr val="55605D"/>
+                </a:solidFill>
+                <a:latin typeface="Calibri"/>
+              </a:rPr>
+              <a:t>unb.ca/cic/datasets/ids-2017.html</a:t>
+            </a:r>
+          </a:p>
+        </p:txBody>
+      </p:sp>
+      <p:pic>
+        <p:nvPicPr>
+          <p:cNvPr id="17419" name="Picture 17418" descr="qr_6d3531976914.png"/>
+          <p:cNvPicPr>
+            <a:picLocks noChangeAspect="1"/>
+          </p:cNvPicPr>
+          <p:nvPr/>
+        </p:nvPicPr>
+        <p:blipFill>
+          <a:blip r:embed="rId10"/>
+          <a:stretch>
+            <a:fillRect/>
+          </a:stretch>
+        </p:blipFill>
+        <p:spPr>
+          <a:xfrm>
+            <a:off x="7955280" y="5541264"/>
+            <a:ext cx="713232" cy="713232"/>
+          </a:xfrm>
+          <a:prstGeom prst="rect">
+            <a:avLst/>
+          </a:prstGeom>
+        </p:spPr>
+      </p:pic>
+      <p:sp>
+        <p:nvSpPr>
+          <p:cNvPr id="17420" name="TextBox 17419"/>
+          <p:cNvSpPr txBox="1"/>
+          <p:nvPr/>
+        </p:nvSpPr>
+        <p:spPr>
+          <a:xfrm>
+            <a:off x="8759952" y="5577840"/>
+            <a:ext cx="2743200" cy="201168"/>
+          </a:xfrm>
+          <a:prstGeom prst="rect">
+            <a:avLst/>
+          </a:prstGeom>
+          <a:noFill/>
+        </p:spPr>
+        <p:txBody>
+          <a:bodyPr wrap="square" lIns="0" rIns="0" tIns="0" bIns="0">
+            <a:spAutoFit/>
+          </a:bodyPr>
+          <a:lstStyle/>
+          <a:p>
+            <a:pPr algn="l"/>
+            <a:r>
+              <a:rPr sz="900" b="1">
+                <a:solidFill>
+                  <a:srgbClr val="141918"/>
+                </a:solidFill>
+                <a:latin typeface="Calibri"/>
+              </a:rPr>
+              <a:t>Why the corrected one (Engelen 2021)</a:t>
+            </a:r>
+          </a:p>
+        </p:txBody>
+      </p:sp>
+      <p:sp>
+        <p:nvSpPr>
+          <p:cNvPr id="17421" name="TextBox 17420"/>
+          <p:cNvSpPr txBox="1"/>
+          <p:nvPr/>
+        </p:nvSpPr>
+        <p:spPr>
+          <a:xfrm>
+            <a:off x="8759952" y="5797296"/>
+            <a:ext cx="2743200" cy="365760"/>
+          </a:xfrm>
+          <a:prstGeom prst="rect">
+            <a:avLst/>
+          </a:prstGeom>
+          <a:noFill/>
+        </p:spPr>
+        <p:txBody>
+          <a:bodyPr wrap="square" lIns="0" rIns="0" tIns="0" bIns="0">
+            <a:spAutoFit/>
+          </a:bodyPr>
+          <a:lstStyle/>
+          <a:p>
+            <a:pPr algn="l"/>
+            <a:r>
+              <a:rPr sz="800" b="0">
+                <a:solidFill>
+                  <a:srgbClr val="55605D"/>
+                </a:solidFill>
+                <a:latin typeface="Calibri"/>
+              </a:rPr>
+              <a:t>doi.org/10.1109/SPW53761.2021.00009</a:t>
+            </a:r>
+          </a:p>
+        </p:txBody>
+      </p:sp>
     </p:spTree>
     <p:extLst>
       <p:ext uri="{BB962C8B-B14F-4D97-AF65-F5344CB8AC3E}">
